--- a/knowledge/自動車アフターマーケット・部品卸/イエローハット_資料/ASIS_Phase1_業務フロー_YH回答反映.pptx
+++ b/knowledge/自動車アフターマーケット・部品卸/イエローハット_資料/ASIS_Phase1_業務フロー_YH回答反映.pptx
@@ -3107,60 +3107,6 @@
         </p:nvSpPr>
         <p:spPr>
           <a:xfrm>
-            <a:off x="45720" y="45720"/>
-            <a:ext cx="9509760" cy="12710160"/>
-          </a:xfrm>
-          <a:prstGeom prst="rect">
-            <a:avLst/>
-          </a:prstGeom>
-          <a:solidFill>
-            <a:srgbClr val="FFFFFF"/>
-          </a:solidFill>
-          <a:ln w="10160">
-            <a:solidFill>
-              <a:srgbClr val="FFFFFF"/>
-            </a:solidFill>
-          </a:ln>
-        </p:spPr>
-        <p:style>
-          <a:lnRef idx="1">
-            <a:schemeClr val="accent1"/>
-          </a:lnRef>
-          <a:fillRef idx="3">
-            <a:schemeClr val="accent1"/>
-          </a:fillRef>
-          <a:effectRef idx="2">
-            <a:schemeClr val="accent1"/>
-          </a:effectRef>
-          <a:fontRef idx="minor">
-            <a:schemeClr val="lt1"/>
-          </a:fontRef>
-        </p:style>
-        <p:txBody>
-          <a:bodyPr rtlCol="0" anchor="ctr" lIns="27432" rIns="27432" tIns="27432" bIns="27432"/>
-          <a:lstStyle/>
-          <a:p>
-            <a:pPr algn="ctr"/>
-            <a:r>
-              <a:rPr sz="800" b="0">
-                <a:solidFill>
-                  <a:srgbClr val="333333"/>
-                </a:solidFill>
-                <a:latin typeface="Yu Gothic"/>
-              </a:rPr>
-              <a:t/>
-            </a:r>
-          </a:p>
-        </p:txBody>
-      </p:sp>
-      <p:sp>
-        <p:nvSpPr>
-          <p:cNvPr id="3" name="Rectangle 2"/>
-          <p:cNvSpPr/>
-          <p:nvPr/>
-        </p:nvSpPr>
-        <p:spPr>
-          <a:xfrm>
             <a:off x="502920" y="438912"/>
             <a:ext cx="8046720" cy="347472"/>
           </a:xfrm>
@@ -3209,7 +3155,7 @@
       </p:sp>
       <p:sp>
         <p:nvSpPr>
-          <p:cNvPr id="4" name="Rectangle 3"/>
+          <p:cNvPr id="3" name="Rectangle 2"/>
           <p:cNvSpPr/>
           <p:nvPr/>
         </p:nvSpPr>
@@ -3264,7 +3210,7 @@
       </p:sp>
       <p:sp>
         <p:nvSpPr>
-          <p:cNvPr id="5" name="Rectangle 4"/>
+          <p:cNvPr id="4" name="Rectangle 3"/>
           <p:cNvSpPr/>
           <p:nvPr/>
         </p:nvSpPr>
@@ -3318,7 +3264,7 @@
       </p:sp>
       <p:sp>
         <p:nvSpPr>
-          <p:cNvPr id="6" name="Rectangle 5"/>
+          <p:cNvPr id="5" name="Rectangle 4"/>
           <p:cNvSpPr/>
           <p:nvPr/>
         </p:nvSpPr>
@@ -3372,7 +3318,7 @@
       </p:sp>
       <p:sp>
         <p:nvSpPr>
-          <p:cNvPr id="7" name="Rectangle 6"/>
+          <p:cNvPr id="6" name="Rectangle 5"/>
           <p:cNvSpPr/>
           <p:nvPr/>
         </p:nvSpPr>
@@ -3553,7 +3499,7 @@
                 </a:solidFill>
                 <a:latin typeface="Yu Gothic"/>
               </a:rPr>
-              <a:t>YH回答：商品マスタ自動連携はPOSのみ／入庫都度、倉庫・店舗側から基幹へ在庫集約</a:t>
+              <a:t>YH回答：商品マスタ自動連携はPOSのみ／仕入データは各店舗・倉庫へ到着し入荷入力／入庫都度、基幹へ在庫集約</a:t>
             </a:r>
           </a:p>
         </p:txBody>
@@ -6091,98 +6037,9 @@
           <p:nvPr/>
         </p:nvCxnSpPr>
         <p:spPr>
-          <a:xfrm flipH="1">
-            <a:off x="2667762" y="6766560"/>
-            <a:ext cx="2247138" cy="0"/>
-          </a:xfrm>
-          <a:prstGeom prst="line">
-            <a:avLst/>
-          </a:prstGeom>
-          <a:ln w="16510">
-            <a:solidFill>
-              <a:srgbClr val="8B5A2B"/>
-            </a:solidFill>
-          </a:ln>
-        </p:spPr>
-        <p:style>
-          <a:lnRef idx="2">
-            <a:schemeClr val="accent1"/>
-          </a:lnRef>
-          <a:fillRef idx="0">
-            <a:schemeClr val="accent1"/>
-          </a:fillRef>
-          <a:effectRef idx="1">
-            <a:schemeClr val="accent1"/>
-          </a:effectRef>
-          <a:fontRef idx="minor">
-            <a:schemeClr val="tx1"/>
-          </a:fontRef>
-        </p:style>
-      </p:cxnSp>
-      <p:sp>
-        <p:nvSpPr>
-          <p:cNvPr id="55" name="Rounded Rectangle 54"/>
-          <p:cNvSpPr/>
-          <p:nvPr/>
-        </p:nvSpPr>
-        <p:spPr>
-          <a:xfrm>
-            <a:off x="2065020" y="6583680"/>
-            <a:ext cx="1205484" cy="402336"/>
-          </a:xfrm>
-          <a:prstGeom prst="roundRect">
-            <a:avLst/>
-          </a:prstGeom>
-          <a:solidFill>
-            <a:srgbClr val="FFFFFF"/>
-          </a:solidFill>
-          <a:ln w="10160">
-            <a:solidFill>
-              <a:srgbClr val="1F4E78"/>
-            </a:solidFill>
-          </a:ln>
-        </p:spPr>
-        <p:style>
-          <a:lnRef idx="1">
-            <a:schemeClr val="accent1"/>
-          </a:lnRef>
-          <a:fillRef idx="3">
-            <a:schemeClr val="accent1"/>
-          </a:fillRef>
-          <a:effectRef idx="2">
-            <a:schemeClr val="accent1"/>
-          </a:effectRef>
-          <a:fontRef idx="minor">
-            <a:schemeClr val="lt1"/>
-          </a:fontRef>
-        </p:style>
-        <p:txBody>
-          <a:bodyPr rtlCol="0" anchor="ctr" lIns="27432" rIns="27432" tIns="27432" bIns="27432"/>
-          <a:lstStyle/>
-          <a:p>
-            <a:pPr algn="ctr"/>
-            <a:r>
-              <a:rPr sz="750" b="1">
-                <a:solidFill>
-                  <a:srgbClr val="1F4E78"/>
-                </a:solidFill>
-                <a:latin typeface="Yu Gothic"/>
-              </a:rPr>
-              <a:t>仕入データ受信</a:t>
-            </a:r>
-          </a:p>
-        </p:txBody>
-      </p:sp>
-      <p:cxnSp>
-        <p:nvCxnSpPr>
-          <p:cNvPr id="56" name="Connector 55"/>
-          <p:cNvCxnSpPr/>
-          <p:nvPr/>
-        </p:nvCxnSpPr>
-        <p:spPr>
-          <a:xfrm>
-            <a:off x="5517642" y="6903720"/>
-            <a:ext cx="1424940" cy="576072"/>
+          <a:xfrm>
+            <a:off x="5517642" y="6748272"/>
+            <a:ext cx="1424940" cy="475488"/>
           </a:xfrm>
           <a:prstGeom prst="line">
             <a:avLst/>
@@ -6210,14 +6067,14 @@
       </p:cxnSp>
       <p:cxnSp>
         <p:nvCxnSpPr>
-          <p:cNvPr id="57" name="Connector 56"/>
+          <p:cNvPr id="55" name="Connector 54"/>
           <p:cNvCxnSpPr/>
           <p:nvPr/>
         </p:nvCxnSpPr>
         <p:spPr>
           <a:xfrm>
-            <a:off x="5517642" y="6903720"/>
-            <a:ext cx="2849880" cy="576072"/>
+            <a:off x="5517642" y="6748272"/>
+            <a:ext cx="2849880" cy="475488"/>
           </a:xfrm>
           <a:prstGeom prst="line">
             <a:avLst/>
@@ -6245,14 +6102,14 @@
       </p:cxnSp>
       <p:sp>
         <p:nvSpPr>
-          <p:cNvPr id="58" name="Rectangle 57"/>
-          <p:cNvSpPr/>
-          <p:nvPr/>
-        </p:nvSpPr>
-        <p:spPr>
-          <a:xfrm>
-            <a:off x="5197602" y="6967728"/>
-            <a:ext cx="640080" cy="219456"/>
+          <p:cNvPr id="56" name="Rectangle 55"/>
+          <p:cNvSpPr/>
+          <p:nvPr/>
+        </p:nvSpPr>
+        <p:spPr>
+          <a:xfrm>
+            <a:off x="4831842" y="6812280"/>
+            <a:ext cx="1371600" cy="219456"/>
           </a:xfrm>
           <a:prstGeom prst="rect">
             <a:avLst/>
@@ -6292,7 +6149,116 @@
                 </a:solidFill>
                 <a:latin typeface="Yu Gothic"/>
               </a:rPr>
-              <a:t>納品</a:t>
+              <a:t>伝票データ・商品が到着</a:t>
+            </a:r>
+          </a:p>
+        </p:txBody>
+      </p:sp>
+      <p:sp>
+        <p:nvSpPr>
+          <p:cNvPr id="57" name="Rounded Rectangle 56"/>
+          <p:cNvSpPr/>
+          <p:nvPr/>
+        </p:nvSpPr>
+        <p:spPr>
+          <a:xfrm>
+            <a:off x="6321552" y="7269480"/>
+            <a:ext cx="1242060" cy="502920"/>
+          </a:xfrm>
+          <a:prstGeom prst="roundRect">
+            <a:avLst/>
+          </a:prstGeom>
+          <a:solidFill>
+            <a:srgbClr val="E2F0D9"/>
+          </a:solidFill>
+          <a:ln w="10160">
+            <a:solidFill>
+              <a:srgbClr val="70AD47"/>
+            </a:solidFill>
+          </a:ln>
+        </p:spPr>
+        <p:style>
+          <a:lnRef idx="1">
+            <a:schemeClr val="accent1"/>
+          </a:lnRef>
+          <a:fillRef idx="3">
+            <a:schemeClr val="accent1"/>
+          </a:fillRef>
+          <a:effectRef idx="2">
+            <a:schemeClr val="accent1"/>
+          </a:effectRef>
+          <a:fontRef idx="minor">
+            <a:schemeClr val="lt1"/>
+          </a:fontRef>
+        </p:style>
+        <p:txBody>
+          <a:bodyPr rtlCol="0" anchor="ctr" lIns="27432" rIns="27432" tIns="27432" bIns="27432"/>
+          <a:lstStyle/>
+          <a:p>
+            <a:pPr algn="ctr"/>
+            <a:r>
+              <a:rPr sz="750" b="1">
+                <a:solidFill>
+                  <a:srgbClr val="70AD47"/>
+                </a:solidFill>
+                <a:latin typeface="Yu Gothic"/>
+              </a:rPr>
+              <a:t>倉庫システムで
+入荷入力（入庫都度）</a:t>
+            </a:r>
+          </a:p>
+        </p:txBody>
+      </p:sp>
+      <p:sp>
+        <p:nvSpPr>
+          <p:cNvPr id="58" name="Rounded Rectangle 57"/>
+          <p:cNvSpPr/>
+          <p:nvPr/>
+        </p:nvSpPr>
+        <p:spPr>
+          <a:xfrm>
+            <a:off x="6248400" y="7150608"/>
+            <a:ext cx="502920" cy="182880"/>
+          </a:xfrm>
+          <a:prstGeom prst="roundRect">
+            <a:avLst/>
+          </a:prstGeom>
+          <a:solidFill>
+            <a:srgbClr val="70AD47"/>
+          </a:solidFill>
+          <a:ln w="10160">
+            <a:solidFill>
+              <a:srgbClr val="70AD47"/>
+            </a:solidFill>
+          </a:ln>
+        </p:spPr>
+        <p:style>
+          <a:lnRef idx="1">
+            <a:schemeClr val="accent1"/>
+          </a:lnRef>
+          <a:fillRef idx="3">
+            <a:schemeClr val="accent1"/>
+          </a:fillRef>
+          <a:effectRef idx="2">
+            <a:schemeClr val="accent1"/>
+          </a:effectRef>
+          <a:fontRef idx="minor">
+            <a:schemeClr val="lt1"/>
+          </a:fontRef>
+        </p:style>
+        <p:txBody>
+          <a:bodyPr rtlCol="0" anchor="ctr" lIns="9144" rIns="9144" tIns="9144" bIns="9144"/>
+          <a:lstStyle/>
+          <a:p>
+            <a:pPr algn="ctr"/>
+            <a:r>
+              <a:rPr sz="650" b="1">
+                <a:solidFill>
+                  <a:srgbClr val="FFFFFF"/>
+                </a:solidFill>
+                <a:latin typeface="Yu Gothic"/>
+              </a:rPr>
+              <a:t>確定</a:t>
             </a:r>
           </a:p>
         </p:txBody>
@@ -6305,8 +6271,8 @@
         </p:nvSpPr>
         <p:spPr>
           <a:xfrm>
-            <a:off x="6321552" y="7342631"/>
-            <a:ext cx="1242060" cy="457200"/>
+            <a:off x="7746491" y="7269480"/>
+            <a:ext cx="1242060" cy="502920"/>
           </a:xfrm>
           <a:prstGeom prst="roundRect">
             <a:avLst/>
@@ -6346,8 +6312,8 @@
                 </a:solidFill>
                 <a:latin typeface="Yu Gothic"/>
               </a:rPr>
-              <a:t>入荷場所で承認
-入庫都度反映</a:t>
+              <a:t>POSで
+入荷入力（入庫都度）</a:t>
             </a:r>
           </a:p>
         </p:txBody>
@@ -6360,14 +6326,14 @@
         </p:nvSpPr>
         <p:spPr>
           <a:xfrm>
-            <a:off x="7746491" y="7342631"/>
-            <a:ext cx="1242060" cy="457200"/>
+            <a:off x="7673339" y="7150608"/>
+            <a:ext cx="502920" cy="182880"/>
           </a:xfrm>
           <a:prstGeom prst="roundRect">
             <a:avLst/>
           </a:prstGeom>
           <a:solidFill>
-            <a:srgbClr val="E2F0D9"/>
+            <a:srgbClr val="70AD47"/>
           </a:solidFill>
           <a:ln w="10160">
             <a:solidFill>
@@ -6390,58 +6356,76 @@
           </a:fontRef>
         </p:style>
         <p:txBody>
-          <a:bodyPr rtlCol="0" anchor="ctr" lIns="27432" rIns="27432" tIns="27432" bIns="27432"/>
+          <a:bodyPr rtlCol="0" anchor="ctr" lIns="9144" rIns="9144" tIns="9144" bIns="9144"/>
           <a:lstStyle/>
           <a:p>
             <a:pPr algn="ctr"/>
             <a:r>
-              <a:rPr sz="750" b="1">
-                <a:solidFill>
-                  <a:srgbClr val="70AD47"/>
-                </a:solidFill>
-                <a:latin typeface="Yu Gothic"/>
-              </a:rPr>
-              <a:t>店舗で入荷承認
-POSへ入庫</a:t>
-            </a:r>
-          </a:p>
-        </p:txBody>
-      </p:sp>
-      <p:cxnSp>
-        <p:nvCxnSpPr>
-          <p:cNvPr id="61" name="Connector 60"/>
-          <p:cNvCxnSpPr/>
-          <p:nvPr/>
-        </p:nvCxnSpPr>
-        <p:spPr>
-          <a:xfrm flipH="1">
-            <a:off x="2667762" y="7936992"/>
-            <a:ext cx="4274820" cy="338328"/>
-          </a:xfrm>
-          <a:prstGeom prst="line">
-            <a:avLst/>
-          </a:prstGeom>
-          <a:ln w="17780">
-            <a:solidFill>
-              <a:srgbClr val="70AD47"/>
-            </a:solidFill>
-          </a:ln>
-        </p:spPr>
-        <p:style>
-          <a:lnRef idx="2">
-            <a:schemeClr val="accent1"/>
-          </a:lnRef>
-          <a:fillRef idx="0">
-            <a:schemeClr val="accent1"/>
-          </a:fillRef>
-          <a:effectRef idx="1">
-            <a:schemeClr val="accent1"/>
-          </a:effectRef>
-          <a:fontRef idx="minor">
-            <a:schemeClr val="tx1"/>
-          </a:fontRef>
-        </p:style>
-      </p:cxnSp>
+              <a:rPr sz="650" b="1">
+                <a:solidFill>
+                  <a:srgbClr val="FFFFFF"/>
+                </a:solidFill>
+                <a:latin typeface="Yu Gothic"/>
+              </a:rPr>
+              <a:t>確定</a:t>
+            </a:r>
+          </a:p>
+        </p:txBody>
+      </p:sp>
+      <p:sp>
+        <p:nvSpPr>
+          <p:cNvPr id="61" name="Rectangle 60"/>
+          <p:cNvSpPr/>
+          <p:nvPr/>
+        </p:nvSpPr>
+        <p:spPr>
+          <a:xfrm>
+            <a:off x="4850892" y="7882127"/>
+            <a:ext cx="3704844" cy="237744"/>
+          </a:xfrm>
+          <a:prstGeom prst="rect">
+            <a:avLst/>
+          </a:prstGeom>
+          <a:solidFill>
+            <a:srgbClr val="FFFFFF"/>
+          </a:solidFill>
+          <a:ln w="10160">
+            <a:solidFill>
+              <a:srgbClr val="FFFFFF"/>
+            </a:solidFill>
+          </a:ln>
+        </p:spPr>
+        <p:style>
+          <a:lnRef idx="1">
+            <a:schemeClr val="accent1"/>
+          </a:lnRef>
+          <a:fillRef idx="3">
+            <a:schemeClr val="accent1"/>
+          </a:fillRef>
+          <a:effectRef idx="2">
+            <a:schemeClr val="accent1"/>
+          </a:effectRef>
+          <a:fontRef idx="minor">
+            <a:schemeClr val="lt1"/>
+          </a:fontRef>
+        </p:style>
+        <p:txBody>
+          <a:bodyPr rtlCol="0" anchor="ctr" lIns="9144" rIns="9144" tIns="9144" bIns="9144"/>
+          <a:lstStyle/>
+          <a:p>
+            <a:pPr algn="l"/>
+            <a:r>
+              <a:rPr sz="650" b="0">
+                <a:solidFill>
+                  <a:srgbClr val="666666"/>
+                </a:solidFill>
+                <a:latin typeface="Yu Gothic"/>
+              </a:rPr>
+              <a:t>※YH回答の「入荷場所で承認すると反映」＝倉庫・店舗での入荷入力と解釈</a:t>
+            </a:r>
+          </a:p>
+        </p:txBody>
+      </p:sp>
       <p:cxnSp>
         <p:nvCxnSpPr>
           <p:cNvPr id="62" name="Connector 61"/>
@@ -6450,8 +6434,8 @@
         </p:nvCxnSpPr>
         <p:spPr>
           <a:xfrm flipH="1">
-            <a:off x="2667762" y="7936992"/>
-            <a:ext cx="5699760" cy="521208"/>
+            <a:off x="2667762" y="7818120"/>
+            <a:ext cx="4274820" cy="457200"/>
           </a:xfrm>
           <a:prstGeom prst="line">
             <a:avLst/>
@@ -6477,15 +6461,50 @@
           </a:fontRef>
         </p:style>
       </p:cxnSp>
-      <p:sp>
-        <p:nvSpPr>
-          <p:cNvPr id="63" name="Rectangle 62"/>
-          <p:cNvSpPr/>
-          <p:nvPr/>
-        </p:nvSpPr>
-        <p:spPr>
-          <a:xfrm>
-            <a:off x="5212080" y="8065008"/>
+      <p:cxnSp>
+        <p:nvCxnSpPr>
+          <p:cNvPr id="63" name="Connector 62"/>
+          <p:cNvCxnSpPr/>
+          <p:nvPr/>
+        </p:nvCxnSpPr>
+        <p:spPr>
+          <a:xfrm flipH="1">
+            <a:off x="2667762" y="7818120"/>
+            <a:ext cx="5699760" cy="640080"/>
+          </a:xfrm>
+          <a:prstGeom prst="line">
+            <a:avLst/>
+          </a:prstGeom>
+          <a:ln w="17780">
+            <a:solidFill>
+              <a:srgbClr val="70AD47"/>
+            </a:solidFill>
+          </a:ln>
+        </p:spPr>
+        <p:style>
+          <a:lnRef idx="2">
+            <a:schemeClr val="accent1"/>
+          </a:lnRef>
+          <a:fillRef idx="0">
+            <a:schemeClr val="accent1"/>
+          </a:fillRef>
+          <a:effectRef idx="1">
+            <a:schemeClr val="accent1"/>
+          </a:effectRef>
+          <a:fontRef idx="minor">
+            <a:schemeClr val="tx1"/>
+          </a:fontRef>
+        </p:style>
+      </p:cxnSp>
+      <p:sp>
+        <p:nvSpPr>
+          <p:cNvPr id="64" name="Rectangle 63"/>
+          <p:cNvSpPr/>
+          <p:nvPr/>
+        </p:nvSpPr>
+        <p:spPr>
+          <a:xfrm>
+            <a:off x="5212080" y="8101583"/>
             <a:ext cx="1828800" cy="228600"/>
           </a:xfrm>
           <a:prstGeom prst="rect">
@@ -6533,7 +6552,7 @@
       </p:sp>
       <p:sp>
         <p:nvSpPr>
-          <p:cNvPr id="64" name="Rectangle 63"/>
+          <p:cNvPr id="65" name="Rectangle 64"/>
           <p:cNvSpPr/>
           <p:nvPr/>
         </p:nvSpPr>
@@ -6588,7 +6607,7 @@
       </p:sp>
       <p:cxnSp>
         <p:nvCxnSpPr>
-          <p:cNvPr id="65" name="Connector 64"/>
+          <p:cNvPr id="66" name="Connector 65"/>
           <p:cNvCxnSpPr/>
           <p:nvPr/>
         </p:nvCxnSpPr>
@@ -6623,7 +6642,7 @@
       </p:cxnSp>
       <p:sp>
         <p:nvSpPr>
-          <p:cNvPr id="66" name="Rounded Rectangle 65"/>
+          <p:cNvPr id="67" name="Rounded Rectangle 66"/>
           <p:cNvSpPr/>
           <p:nvPr/>
         </p:nvSpPr>
@@ -6678,7 +6697,7 @@
       </p:sp>
       <p:sp>
         <p:nvSpPr>
-          <p:cNvPr id="67" name="Rounded Rectangle 66"/>
+          <p:cNvPr id="68" name="Rounded Rectangle 67"/>
           <p:cNvSpPr/>
           <p:nvPr/>
         </p:nvSpPr>
@@ -6732,7 +6751,7 @@
       </p:sp>
       <p:sp>
         <p:nvSpPr>
-          <p:cNvPr id="68" name="Rounded Rectangle 67"/>
+          <p:cNvPr id="69" name="Rounded Rectangle 68"/>
           <p:cNvSpPr/>
           <p:nvPr/>
         </p:nvSpPr>
@@ -6787,7 +6806,7 @@
       </p:sp>
       <p:sp>
         <p:nvSpPr>
-          <p:cNvPr id="69" name="Rounded Rectangle 68"/>
+          <p:cNvPr id="70" name="Rounded Rectangle 69"/>
           <p:cNvSpPr/>
           <p:nvPr/>
         </p:nvSpPr>
@@ -6842,7 +6861,7 @@
       </p:sp>
       <p:sp>
         <p:nvSpPr>
-          <p:cNvPr id="70" name="Rounded Rectangle 69"/>
+          <p:cNvPr id="71" name="Rounded Rectangle 70"/>
           <p:cNvSpPr/>
           <p:nvPr/>
         </p:nvSpPr>
@@ -6889,10 +6908,10 @@
                 </a:solidFill>
                 <a:latin typeface="Yu Gothic"/>
               </a:rPr>
-              <a:t>YH回答で確定：
-・仕入データは仕入先からオンライン到来、入荷場所で承認して反映（基本手入力なし）
-・入庫都度、倉庫在庫システム／POSから基幹へ集約
-・商品マスタの自動連携はPOSのみ</a:t>
+              <a:t>YH回答＋8/7整理で確定：
+・仕入データ／商品の到着先は各店舗・倉庫。POS／倉庫システムで入荷入力し、入庫都度基幹へ反映（基本手入力なし＝受注側の話）
+・商品マスタの自動連携はPOSのみ
+・倉庫＝倉庫在庫システム、店舗＝POSが実在庫の正で、基幹が集約</a:t>
             </a:r>
           </a:p>
         </p:txBody>
@@ -7026,7 +7045,7 @@
                 </a:solidFill>
                 <a:latin typeface="Yu Gothic"/>
               </a:rPr>
-              <a:t>YH回答：店舗から配送出荷しない／物流部がアナログ制御し各倉庫へ指示／作業時は店舗在庫を使用</a:t>
+              <a:t>YH回答：店舗から配送出荷しない／物流部が各倉庫へ指示（メール・電話と仮置き）／出荷実績登録＝在庫減算・出荷完了</a:t>
             </a:r>
           </a:p>
         </p:txBody>
@@ -8756,7 +8775,7 @@
                 <a:latin typeface="Yu Gothic"/>
               </a:rPr>
               <a:t>店舗在庫の引当
-（交換作業時）</a:t>
+（タイヤ着脱時）</a:t>
             </a:r>
           </a:p>
         </p:txBody>
@@ -8866,11 +8885,11 @@
             <a:avLst/>
           </a:prstGeom>
           <a:solidFill>
-            <a:srgbClr val="FCE4D6"/>
-          </a:solidFill>
-          <a:ln w="10160">
-            <a:solidFill>
-              <a:srgbClr val="ED7D31"/>
+            <a:srgbClr val="D9EAF7"/>
+          </a:solidFill>
+          <a:ln w="10160">
+            <a:solidFill>
+              <a:srgbClr val="2E75B6"/>
             </a:solidFill>
           </a:ln>
         </p:spPr>
@@ -8896,12 +8915,12 @@
             <a:r>
               <a:rPr sz="800" b="1">
                 <a:solidFill>
-                  <a:srgbClr val="ED7D31"/>
-                </a:solidFill>
-                <a:latin typeface="Yu Gothic"/>
-              </a:rPr>
-              <a:t>物流部が
-アナログで制御</a:t>
+                  <a:srgbClr val="2E75B6"/>
+                </a:solidFill>
+                <a:latin typeface="Yu Gothic"/>
+              </a:rPr>
+              <a:t>物流部が制御
+メール・電話（仮）</a:t>
             </a:r>
           </a:p>
         </p:txBody>
@@ -8921,11 +8940,11 @@
             <a:avLst/>
           </a:prstGeom>
           <a:solidFill>
-            <a:srgbClr val="70AD47"/>
-          </a:solidFill>
-          <a:ln w="10160">
-            <a:solidFill>
-              <a:srgbClr val="70AD47"/>
+            <a:srgbClr val="2E75B6"/>
+          </a:solidFill>
+          <a:ln w="10160">
+            <a:solidFill>
+              <a:srgbClr val="2E75B6"/>
             </a:solidFill>
           </a:ln>
         </p:spPr>
@@ -8955,7 +8974,7 @@
                 </a:solidFill>
                 <a:latin typeface="Yu Gothic"/>
               </a:rPr>
-              <a:t>確定</a:t>
+              <a:t>仮置き</a:t>
             </a:r>
           </a:p>
         </p:txBody>
@@ -9620,8 +9639,8 @@
                 </a:solidFill>
                 <a:latin typeface="Yu Gothic"/>
               </a:rPr>
-              <a:t>交換作業が絡む場合
-基本は店舗在庫を使用</a:t>
+              <a:t>タイヤ着脱時は
+店舗在庫を使用</a:t>
             </a:r>
           </a:p>
         </p:txBody>
@@ -9689,7 +9708,7 @@
         <p:spPr>
           <a:xfrm>
             <a:off x="4896612" y="7132320"/>
-            <a:ext cx="1242060" cy="457200"/>
+            <a:ext cx="1242060" cy="502920"/>
           </a:xfrm>
           <a:prstGeom prst="roundRect">
             <a:avLst/>
@@ -9723,14 +9742,14 @@
           <a:p>
             <a:pPr algn="ctr"/>
             <a:r>
-              <a:rPr sz="700" b="0">
+              <a:rPr sz="700" b="1">
                 <a:solidFill>
                   <a:srgbClr val="ED7D31"/>
                 </a:solidFill>
                 <a:latin typeface="Yu Gothic"/>
               </a:rPr>
-              <a:t>Phase1注文内か
-Phase2別オペか要確認</a:t>
+              <a:t>★Phase1の卸販売でも
+発生するかがポイント</a:t>
             </a:r>
           </a:p>
         </p:txBody>
@@ -9797,7 +9816,7 @@
         </p:nvSpPr>
         <p:spPr>
           <a:xfrm>
-            <a:off x="36576" y="8001000"/>
+            <a:off x="36576" y="8092440"/>
             <a:ext cx="438912" cy="512064"/>
           </a:xfrm>
           <a:prstGeom prst="rect">
@@ -9852,7 +9871,7 @@
         </p:nvCxnSpPr>
         <p:spPr>
           <a:xfrm>
-            <a:off x="530352" y="8001000"/>
+            <a:off x="530352" y="8092440"/>
             <a:ext cx="8549640" cy="0"/>
           </a:xfrm>
           <a:prstGeom prst="line">
@@ -9887,8 +9906,8 @@
         </p:nvSpPr>
         <p:spPr>
           <a:xfrm>
-            <a:off x="6321552" y="8211312"/>
-            <a:ext cx="1242060" cy="502920"/>
+            <a:off x="6321552" y="8302752"/>
+            <a:ext cx="1242060" cy="548640"/>
           </a:xfrm>
           <a:prstGeom prst="roundRect">
             <a:avLst/>
@@ -9928,22 +9947,76 @@
                 </a:solidFill>
                 <a:latin typeface="Yu Gothic"/>
               </a:rPr>
-              <a:t>倉庫在庫システム
-数量管理のみ</a:t>
+              <a:t>出荷実績登録
+＝在庫減算・出荷完了</a:t>
+            </a:r>
+          </a:p>
+        </p:txBody>
+      </p:sp>
+      <p:sp>
+        <p:nvSpPr>
+          <p:cNvPr id="62" name="Rounded Rectangle 61"/>
+          <p:cNvSpPr/>
+          <p:nvPr/>
+        </p:nvSpPr>
+        <p:spPr>
+          <a:xfrm>
+            <a:off x="6248400" y="8183879"/>
+            <a:ext cx="502920" cy="182880"/>
+          </a:xfrm>
+          <a:prstGeom prst="roundRect">
+            <a:avLst/>
+          </a:prstGeom>
+          <a:solidFill>
+            <a:srgbClr val="70AD47"/>
+          </a:solidFill>
+          <a:ln w="10160">
+            <a:solidFill>
+              <a:srgbClr val="70AD47"/>
+            </a:solidFill>
+          </a:ln>
+        </p:spPr>
+        <p:style>
+          <a:lnRef idx="1">
+            <a:schemeClr val="accent1"/>
+          </a:lnRef>
+          <a:fillRef idx="3">
+            <a:schemeClr val="accent1"/>
+          </a:fillRef>
+          <a:effectRef idx="2">
+            <a:schemeClr val="accent1"/>
+          </a:effectRef>
+          <a:fontRef idx="minor">
+            <a:schemeClr val="lt1"/>
+          </a:fontRef>
+        </p:style>
+        <p:txBody>
+          <a:bodyPr rtlCol="0" anchor="ctr" lIns="9144" rIns="9144" tIns="9144" bIns="9144"/>
+          <a:lstStyle/>
+          <a:p>
+            <a:pPr algn="ctr"/>
+            <a:r>
+              <a:rPr sz="650" b="1">
+                <a:solidFill>
+                  <a:srgbClr val="FFFFFF"/>
+                </a:solidFill>
+                <a:latin typeface="Yu Gothic"/>
+              </a:rPr>
+              <a:t>確定</a:t>
             </a:r>
           </a:p>
         </p:txBody>
       </p:sp>
       <p:cxnSp>
         <p:nvCxnSpPr>
-          <p:cNvPr id="62" name="Connector 61"/>
+          <p:cNvPr id="63" name="Connector 62"/>
           <p:cNvCxnSpPr/>
           <p:nvPr/>
         </p:nvCxnSpPr>
         <p:spPr>
           <a:xfrm flipH="1">
-            <a:off x="4092702" y="8778240"/>
-            <a:ext cx="2849880" cy="228600"/>
+            <a:off x="4092702" y="8915400"/>
+            <a:ext cx="2849880" cy="210312"/>
           </a:xfrm>
           <a:prstGeom prst="line">
             <a:avLst/>
@@ -9971,24 +10044,24 @@
       </p:cxnSp>
       <p:sp>
         <p:nvSpPr>
-          <p:cNvPr id="63" name="Rounded Rectangle 62"/>
-          <p:cNvSpPr/>
-          <p:nvPr/>
-        </p:nvSpPr>
-        <p:spPr>
-          <a:xfrm>
-            <a:off x="3471672" y="8887968"/>
+          <p:cNvPr id="64" name="Rounded Rectangle 63"/>
+          <p:cNvSpPr/>
+          <p:nvPr/>
+        </p:nvSpPr>
+        <p:spPr>
+          <a:xfrm>
+            <a:off x="3471672" y="9006840"/>
             <a:ext cx="1242060" cy="411480"/>
           </a:xfrm>
           <a:prstGeom prst="roundRect">
             <a:avLst/>
           </a:prstGeom>
           <a:solidFill>
-            <a:srgbClr val="FCE4D6"/>
-          </a:solidFill>
-          <a:ln w="10160">
-            <a:solidFill>
-              <a:srgbClr val="ED7D31"/>
+            <a:srgbClr val="FFFFFF"/>
+          </a:solidFill>
+          <a:ln w="10160">
+            <a:solidFill>
+              <a:srgbClr val="1F4E78"/>
             </a:solidFill>
           </a:ln>
         </p:spPr>
@@ -10012,37 +10085,92 @@
           <a:p>
             <a:pPr algn="ctr"/>
             <a:r>
-              <a:rPr sz="750" b="0">
-                <a:solidFill>
-                  <a:srgbClr val="ED7D31"/>
-                </a:solidFill>
-                <a:latin typeface="Yu Gothic"/>
-              </a:rPr>
-              <a:t>基幹へ実績反映？</a:t>
-            </a:r>
-          </a:p>
-        </p:txBody>
-      </p:sp>
-      <p:sp>
-        <p:nvSpPr>
-          <p:cNvPr id="64" name="Rounded Rectangle 63"/>
-          <p:cNvSpPr/>
-          <p:nvPr/>
-        </p:nvSpPr>
-        <p:spPr>
-          <a:xfrm>
-            <a:off x="3398520" y="8769096"/>
-            <a:ext cx="502920" cy="182880"/>
+              <a:rPr sz="750" b="1">
+                <a:solidFill>
+                  <a:srgbClr val="1F4E78"/>
+                </a:solidFill>
+                <a:latin typeface="Yu Gothic"/>
+              </a:rPr>
+              <a:t>基幹へ実績反映</a:t>
+            </a:r>
+          </a:p>
+        </p:txBody>
+      </p:sp>
+      <p:sp>
+        <p:nvSpPr>
+          <p:cNvPr id="65" name="Rounded Rectangle 64"/>
+          <p:cNvSpPr/>
+          <p:nvPr/>
+        </p:nvSpPr>
+        <p:spPr>
+          <a:xfrm>
+            <a:off x="7746491" y="8302752"/>
+            <a:ext cx="1242060" cy="548640"/>
           </a:xfrm>
           <a:prstGeom prst="roundRect">
             <a:avLst/>
           </a:prstGeom>
           <a:solidFill>
-            <a:srgbClr val="ED7D31"/>
-          </a:solidFill>
-          <a:ln w="10160">
-            <a:solidFill>
-              <a:srgbClr val="ED7D31"/>
+            <a:srgbClr val="E2F0D9"/>
+          </a:solidFill>
+          <a:ln w="10160">
+            <a:solidFill>
+              <a:srgbClr val="70AD47"/>
+            </a:solidFill>
+          </a:ln>
+        </p:spPr>
+        <p:style>
+          <a:lnRef idx="1">
+            <a:schemeClr val="accent1"/>
+          </a:lnRef>
+          <a:fillRef idx="3">
+            <a:schemeClr val="accent1"/>
+          </a:fillRef>
+          <a:effectRef idx="2">
+            <a:schemeClr val="accent1"/>
+          </a:effectRef>
+          <a:fontRef idx="minor">
+            <a:schemeClr val="lt1"/>
+          </a:fontRef>
+        </p:style>
+        <p:txBody>
+          <a:bodyPr rtlCol="0" anchor="ctr" lIns="27432" rIns="27432" tIns="27432" bIns="27432"/>
+          <a:lstStyle/>
+          <a:p>
+            <a:pPr algn="ctr"/>
+            <a:r>
+              <a:rPr sz="750" b="1">
+                <a:solidFill>
+                  <a:srgbClr val="70AD47"/>
+                </a:solidFill>
+                <a:latin typeface="Yu Gothic"/>
+              </a:rPr>
+              <a:t>店舗利用分は
+POSで売上計上</a:t>
+            </a:r>
+          </a:p>
+        </p:txBody>
+      </p:sp>
+      <p:sp>
+        <p:nvSpPr>
+          <p:cNvPr id="66" name="Rectangle 65"/>
+          <p:cNvSpPr/>
+          <p:nvPr/>
+        </p:nvSpPr>
+        <p:spPr>
+          <a:xfrm>
+            <a:off x="4850892" y="9528048"/>
+            <a:ext cx="3989832" cy="219456"/>
+          </a:xfrm>
+          <a:prstGeom prst="rect">
+            <a:avLst/>
+          </a:prstGeom>
+          <a:solidFill>
+            <a:srgbClr val="FFFFFF"/>
+          </a:solidFill>
+          <a:ln w="10160">
+            <a:solidFill>
+              <a:srgbClr val="FFFFFF"/>
             </a:solidFill>
           </a:ln>
         </p:spPr>
@@ -10064,124 +10192,15 @@
           <a:bodyPr rtlCol="0" anchor="ctr" lIns="9144" rIns="9144" tIns="9144" bIns="9144"/>
           <a:lstStyle/>
           <a:p>
-            <a:pPr algn="ctr"/>
-            <a:r>
-              <a:rPr sz="650" b="1">
-                <a:solidFill>
-                  <a:srgbClr val="FFFFFF"/>
-                </a:solidFill>
-                <a:latin typeface="Yu Gothic"/>
-              </a:rPr>
-              <a:t>要確認</a:t>
-            </a:r>
-          </a:p>
-        </p:txBody>
-      </p:sp>
-      <p:sp>
-        <p:nvSpPr>
-          <p:cNvPr id="65" name="Rounded Rectangle 64"/>
-          <p:cNvSpPr/>
-          <p:nvPr/>
-        </p:nvSpPr>
-        <p:spPr>
-          <a:xfrm>
-            <a:off x="7746491" y="8211312"/>
-            <a:ext cx="1242060" cy="502920"/>
-          </a:xfrm>
-          <a:prstGeom prst="roundRect">
-            <a:avLst/>
-          </a:prstGeom>
-          <a:solidFill>
-            <a:srgbClr val="FFFFFF"/>
-          </a:solidFill>
-          <a:ln w="10160">
-            <a:solidFill>
-              <a:srgbClr val="1F4E78"/>
-            </a:solidFill>
-          </a:ln>
-        </p:spPr>
-        <p:style>
-          <a:lnRef idx="1">
-            <a:schemeClr val="accent1"/>
-          </a:lnRef>
-          <a:fillRef idx="3">
-            <a:schemeClr val="accent1"/>
-          </a:fillRef>
-          <a:effectRef idx="2">
-            <a:schemeClr val="accent1"/>
-          </a:effectRef>
-          <a:fontRef idx="minor">
-            <a:schemeClr val="lt1"/>
-          </a:fontRef>
-        </p:style>
-        <p:txBody>
-          <a:bodyPr rtlCol="0" anchor="ctr" lIns="27432" rIns="27432" tIns="27432" bIns="27432"/>
-          <a:lstStyle/>
-          <a:p>
-            <a:pPr algn="ctr"/>
-            <a:r>
-              <a:rPr sz="750" b="1">
-                <a:solidFill>
-                  <a:srgbClr val="1F4E78"/>
-                </a:solidFill>
-                <a:latin typeface="Yu Gothic"/>
-              </a:rPr>
-              <a:t>店舗POSへ
-売上計上</a:t>
-            </a:r>
-          </a:p>
-        </p:txBody>
-      </p:sp>
-      <p:sp>
-        <p:nvSpPr>
-          <p:cNvPr id="66" name="Rectangle 65"/>
-          <p:cNvSpPr/>
-          <p:nvPr/>
-        </p:nvSpPr>
-        <p:spPr>
-          <a:xfrm>
-            <a:off x="6321552" y="9454896"/>
-            <a:ext cx="2849880" cy="219456"/>
-          </a:xfrm>
-          <a:prstGeom prst="rect">
-            <a:avLst/>
-          </a:prstGeom>
-          <a:solidFill>
-            <a:srgbClr val="FFFFFF"/>
-          </a:solidFill>
-          <a:ln w="10160">
-            <a:solidFill>
-              <a:srgbClr val="FFFFFF"/>
-            </a:solidFill>
-          </a:ln>
-        </p:spPr>
-        <p:style>
-          <a:lnRef idx="1">
-            <a:schemeClr val="accent1"/>
-          </a:lnRef>
-          <a:fillRef idx="3">
-            <a:schemeClr val="accent1"/>
-          </a:fillRef>
-          <a:effectRef idx="2">
-            <a:schemeClr val="accent1"/>
-          </a:effectRef>
-          <a:fontRef idx="minor">
-            <a:schemeClr val="lt1"/>
-          </a:fontRef>
-        </p:style>
-        <p:txBody>
-          <a:bodyPr rtlCol="0" anchor="ctr" lIns="9144" rIns="9144" tIns="9144" bIns="9144"/>
-          <a:lstStyle/>
-          <a:p>
             <a:pPr algn="l"/>
             <a:r>
-              <a:rPr sz="650" b="0">
+              <a:rPr sz="680" b="0">
                 <a:solidFill>
                   <a:srgbClr val="666666"/>
                 </a:solidFill>
                 <a:latin typeface="Yu Gothic"/>
               </a:rPr>
-              <a:t>回答：「倉庫在庫システムで数量管理のみ、卸先・店舗POSへの売上計上」</a:t>
+              <a:t>※「売上計上」＝出荷実績登録（在庫を減らし出荷完了とする）と整理</a:t>
             </a:r>
           </a:p>
         </p:txBody>
@@ -10194,7 +10213,7 @@
         </p:nvSpPr>
         <p:spPr>
           <a:xfrm>
-            <a:off x="7746491" y="9802368"/>
+            <a:off x="7746491" y="9829800"/>
             <a:ext cx="1242060" cy="457200"/>
           </a:xfrm>
           <a:prstGeom prst="roundRect">
@@ -10249,7 +10268,7 @@
         </p:nvSpPr>
         <p:spPr>
           <a:xfrm>
-            <a:off x="713232" y="10469880"/>
+            <a:off x="713232" y="10561320"/>
             <a:ext cx="8183879" cy="777240"/>
           </a:xfrm>
           <a:prstGeom prst="roundRect">
@@ -10290,9 +10309,7 @@
                 </a:solidFill>
                 <a:latin typeface="Yu Gothic"/>
               </a:rPr>
-              <a:t>欠品時のメーカー手配（要望確認済）：
-新ECでは「自社在庫を表示 → 欠品時は取寄せ注文 → 管理サイトからメーカーへ発注指示」のイメージで先方了承。
-※本スライドはAS-IS中心のため、TO-BEのメーカー取寄せフローは別図化推奨。</a:t>
+              <a:t>欠品時のメーカー手配（要望確認済）：新ECでは「自社在庫を表示 → 欠品時は取寄せ注文 → 管理サイトからメーカーへ発注指示」で先方了承。</a:t>
             </a:r>
           </a:p>
         </p:txBody>
@@ -10372,7 +10389,7 @@
                 </a:solidFill>
                 <a:latin typeface="Yu Gothic"/>
               </a:rPr>
-              <a:t>業務フロー作成上の確認事項</a:t>
+              <a:t>整理結果と残る確認事項</a:t>
             </a:r>
           </a:p>
         </p:txBody>
@@ -10426,7 +10443,7 @@
                 </a:solidFill>
                 <a:latin typeface="Yu Gothic"/>
               </a:rPr>
-              <a:t>YH回答で確定したことと、矢印を確定するために追加で確認したいこと</a:t>
+              <a:t>8/7整理：仮置き・解釈で潰した項目と、残る本丸1点＋補足1点</a:t>
             </a:r>
           </a:p>
         </p:txBody>
@@ -10480,7 +10497,7 @@
                 </a:solidFill>
                 <a:latin typeface="Yu Gothic"/>
               </a:rPr>
-              <a:t>回答で確定したこと</a:t>
+              <a:t>確定・整理済み</a:t>
             </a:r>
           </a:p>
         </p:txBody>
@@ -10494,7 +10511,7 @@
         <p:spPr>
           <a:xfrm>
             <a:off x="749808" y="1874519"/>
-            <a:ext cx="3794760" cy="530352"/>
+            <a:ext cx="3794760" cy="566928"/>
           </a:xfrm>
           <a:prstGeom prst="roundRect">
             <a:avLst/>
@@ -10528,7 +10545,7 @@
           <a:p>
             <a:pPr algn="l"/>
             <a:r>
-              <a:rPr sz="800" b="0">
+              <a:rPr sz="760" b="0">
                 <a:solidFill>
                   <a:srgbClr val="333333"/>
                 </a:solidFill>
@@ -10547,8 +10564,8 @@
         </p:nvSpPr>
         <p:spPr>
           <a:xfrm>
-            <a:off x="749808" y="2514600"/>
-            <a:ext cx="3794760" cy="530352"/>
+            <a:off x="749808" y="2551176"/>
+            <a:ext cx="3794760" cy="566928"/>
           </a:xfrm>
           <a:prstGeom prst="roundRect">
             <a:avLst/>
@@ -10582,7 +10599,7 @@
           <a:p>
             <a:pPr algn="l"/>
             <a:r>
-              <a:rPr sz="800" b="0">
+              <a:rPr sz="760" b="0">
                 <a:solidFill>
                   <a:srgbClr val="333333"/>
                 </a:solidFill>
@@ -10601,8 +10618,8 @@
         </p:nvSpPr>
         <p:spPr>
           <a:xfrm>
-            <a:off x="749808" y="3154680"/>
-            <a:ext cx="3794760" cy="530352"/>
+            <a:off x="749808" y="3227832"/>
+            <a:ext cx="3794760" cy="566928"/>
           </a:xfrm>
           <a:prstGeom prst="roundRect">
             <a:avLst/>
@@ -10636,13 +10653,13 @@
           <a:p>
             <a:pPr algn="l"/>
             <a:r>
-              <a:rPr sz="800" b="0">
+              <a:rPr sz="760" b="0">
                 <a:solidFill>
                   <a:srgbClr val="333333"/>
                 </a:solidFill>
                 <a:latin typeface="Yu Gothic"/>
               </a:rPr>
-              <a:t>3. 実在庫：倉庫側・POSが正、基幹が集約</a:t>
+              <a:t>3. 実在庫：倉庫システム・POSが正、基幹が集約</a:t>
             </a:r>
           </a:p>
         </p:txBody>
@@ -10655,8 +10672,8 @@
         </p:nvSpPr>
         <p:spPr>
           <a:xfrm>
-            <a:off x="749808" y="3794760"/>
-            <a:ext cx="3794760" cy="530352"/>
+            <a:off x="749808" y="3904488"/>
+            <a:ext cx="3794760" cy="566928"/>
           </a:xfrm>
           <a:prstGeom prst="roundRect">
             <a:avLst/>
@@ -10690,13 +10707,13 @@
           <a:p>
             <a:pPr algn="l"/>
             <a:r>
-              <a:rPr sz="800" b="0">
+              <a:rPr sz="760" b="0">
                 <a:solidFill>
                   <a:srgbClr val="333333"/>
                 </a:solidFill>
                 <a:latin typeface="Yu Gothic"/>
               </a:rPr>
-              <a:t>4. 仕入先伝発→オンライン到来→入荷場所承認→入庫都度反映</a:t>
+              <a:t>4. 仕入データ・商品の到着先は各店舗・倉庫。POS／倉庫システムで入荷入力（入庫都度）</a:t>
             </a:r>
           </a:p>
         </p:txBody>
@@ -10709,8 +10726,8 @@
         </p:nvSpPr>
         <p:spPr>
           <a:xfrm>
-            <a:off x="749808" y="4434840"/>
-            <a:ext cx="3794760" cy="530352"/>
+            <a:off x="749808" y="4581144"/>
+            <a:ext cx="3794760" cy="566928"/>
           </a:xfrm>
           <a:prstGeom prst="roundRect">
             <a:avLst/>
@@ -10744,7 +10761,7 @@
           <a:p>
             <a:pPr algn="l"/>
             <a:r>
-              <a:rPr sz="800" b="0">
+              <a:rPr sz="760" b="0">
                 <a:solidFill>
                   <a:srgbClr val="333333"/>
                 </a:solidFill>
@@ -10763,8 +10780,8 @@
         </p:nvSpPr>
         <p:spPr>
           <a:xfrm>
-            <a:off x="749808" y="5074920"/>
-            <a:ext cx="3794760" cy="530352"/>
+            <a:off x="749808" y="5257800"/>
+            <a:ext cx="3794760" cy="566928"/>
           </a:xfrm>
           <a:prstGeom prst="roundRect">
             <a:avLst/>
@@ -10798,7 +10815,7 @@
           <a:p>
             <a:pPr algn="l"/>
             <a:r>
-              <a:rPr sz="800" b="0">
+              <a:rPr sz="760" b="0">
                 <a:solidFill>
                   <a:srgbClr val="333333"/>
                 </a:solidFill>
@@ -10817,8 +10834,8 @@
         </p:nvSpPr>
         <p:spPr>
           <a:xfrm>
-            <a:off x="749808" y="5715000"/>
-            <a:ext cx="3794760" cy="530352"/>
+            <a:off x="749808" y="5934456"/>
+            <a:ext cx="3794760" cy="566928"/>
           </a:xfrm>
           <a:prstGeom prst="roundRect">
             <a:avLst/>
@@ -10852,13 +10869,13 @@
           <a:p>
             <a:pPr algn="l"/>
             <a:r>
-              <a:rPr sz="800" b="0">
+              <a:rPr sz="760" b="0">
                 <a:solidFill>
                   <a:srgbClr val="333333"/>
                 </a:solidFill>
                 <a:latin typeface="Yu Gothic"/>
               </a:rPr>
-              <a:t>7. 店舗から配送出荷しない／物流部が各倉庫へアナログ指示</a:t>
+              <a:t>7. 店舗から配送出荷しない／タイヤ着脱時は店舗在庫を使用</a:t>
             </a:r>
           </a:p>
         </p:txBody>
@@ -10871,8 +10888,8 @@
         </p:nvSpPr>
         <p:spPr>
           <a:xfrm>
-            <a:off x="749808" y="6355080"/>
-            <a:ext cx="3794760" cy="530352"/>
+            <a:off x="749808" y="6611112"/>
+            <a:ext cx="3794760" cy="566928"/>
           </a:xfrm>
           <a:prstGeom prst="roundRect">
             <a:avLst/>
@@ -10906,13 +10923,13 @@
           <a:p>
             <a:pPr algn="l"/>
             <a:r>
-              <a:rPr sz="800" b="0">
+              <a:rPr sz="760" b="0">
                 <a:solidFill>
                   <a:srgbClr val="333333"/>
                 </a:solidFill>
                 <a:latin typeface="Yu Gothic"/>
               </a:rPr>
-              <a:t>8. 交換作業時は店舗在庫を使う</a:t>
+              <a:t>8. 「売上計上」＝出荷実績登録（在庫減算・出荷完了）と整理</a:t>
             </a:r>
           </a:p>
         </p:txBody>
@@ -10920,6 +10937,60 @@
       <p:sp>
         <p:nvSpPr>
           <p:cNvPr id="13" name="Rounded Rectangle 12"/>
+          <p:cNvSpPr/>
+          <p:nvPr/>
+        </p:nvSpPr>
+        <p:spPr>
+          <a:xfrm>
+            <a:off x="749808" y="7287768"/>
+            <a:ext cx="3794760" cy="566928"/>
+          </a:xfrm>
+          <a:prstGeom prst="roundRect">
+            <a:avLst/>
+          </a:prstGeom>
+          <a:solidFill>
+            <a:srgbClr val="E2F0D9"/>
+          </a:solidFill>
+          <a:ln w="10160">
+            <a:solidFill>
+              <a:srgbClr val="AAB7C4"/>
+            </a:solidFill>
+          </a:ln>
+        </p:spPr>
+        <p:style>
+          <a:lnRef idx="1">
+            <a:schemeClr val="accent1"/>
+          </a:lnRef>
+          <a:fillRef idx="3">
+            <a:schemeClr val="accent1"/>
+          </a:fillRef>
+          <a:effectRef idx="2">
+            <a:schemeClr val="accent1"/>
+          </a:effectRef>
+          <a:fontRef idx="minor">
+            <a:schemeClr val="lt1"/>
+          </a:fontRef>
+        </p:style>
+        <p:txBody>
+          <a:bodyPr rtlCol="0" anchor="ctr" lIns="64008" rIns="64008" tIns="64008" bIns="64008"/>
+          <a:lstStyle/>
+          <a:p>
+            <a:pPr algn="l"/>
+            <a:r>
+              <a:rPr sz="760" b="0">
+                <a:solidFill>
+                  <a:srgbClr val="333333"/>
+                </a:solidFill>
+                <a:latin typeface="Yu Gothic"/>
+              </a:rPr>
+              <a:t>9. 物流部の指示手段：メール・電話（仮置き。詳細は打合せで補足）</a:t>
+            </a:r>
+          </a:p>
+        </p:txBody>
+      </p:sp>
+      <p:sp>
+        <p:nvSpPr>
+          <p:cNvPr id="14" name="Rounded Rectangle 13"/>
           <p:cNvSpPr/>
           <p:nvPr/>
         </p:nvSpPr>
@@ -10966,14 +11037,14 @@
                 </a:solidFill>
                 <a:latin typeface="Yu Gothic"/>
               </a:rPr>
-              <a:t>追加で確認したいこと（5点）</a:t>
-            </a:r>
-          </a:p>
-        </p:txBody>
-      </p:sp>
-      <p:sp>
-        <p:nvSpPr>
-          <p:cNvPr id="14" name="Rounded Rectangle 13"/>
+              <a:t>残る確認（本丸1点＋補足1点）</a:t>
+            </a:r>
+          </a:p>
+        </p:txBody>
+      </p:sp>
+      <p:sp>
+        <p:nvSpPr>
+          <p:cNvPr id="15" name="Rounded Rectangle 14"/>
           <p:cNvSpPr/>
           <p:nvPr/>
         </p:nvSpPr>
@@ -11014,27 +11085,27 @@
           <a:p>
             <a:pPr algn="ctr"/>
             <a:r>
-              <a:rPr sz="750" b="1">
+              <a:rPr sz="800" b="1">
                 <a:solidFill>
                   <a:srgbClr val="FFFFFF"/>
                 </a:solidFill>
                 <a:latin typeface="Yu Gothic"/>
               </a:rPr>
-              <a:t>Q1</a:t>
-            </a:r>
-          </a:p>
-        </p:txBody>
-      </p:sp>
-      <p:sp>
-        <p:nvSpPr>
-          <p:cNvPr id="15" name="Rounded Rectangle 14"/>
+              <a:t>★</a:t>
+            </a:r>
+          </a:p>
+        </p:txBody>
+      </p:sp>
+      <p:sp>
+        <p:nvSpPr>
+          <p:cNvPr id="16" name="Rounded Rectangle 15"/>
           <p:cNvSpPr/>
           <p:nvPr/>
         </p:nvSpPr>
         <p:spPr>
           <a:xfrm>
             <a:off x="5577840" y="1874519"/>
-            <a:ext cx="3182112" cy="841248"/>
+            <a:ext cx="3182112" cy="1417320"/>
           </a:xfrm>
           <a:prstGeom prst="roundRect">
             <a:avLst/>
@@ -11074,20 +11145,22 @@
                 </a:solidFill>
                 <a:latin typeface="Yu Gothic"/>
               </a:rPr>
-              <a:t>適合／倉庫システムは基幹商品マスタを「使用」とのことですが、自動連携以外の反映方法（CSV・参照・手動）は？</a:t>
-            </a:r>
-          </a:p>
-        </p:txBody>
-      </p:sp>
-      <p:sp>
-        <p:nvSpPr>
-          <p:cNvPr id="16" name="Rounded Rectangle 15"/>
-          <p:cNvSpPr/>
-          <p:nvPr/>
-        </p:nvSpPr>
-        <p:spPr>
-          <a:xfrm>
-            <a:off x="4992624" y="2898648"/>
+              <a:t>タイヤ着脱での店舗在庫利用は、Phase1の卸販売（BtoB注文）でも発生しますか？
+それとも作業依頼（Phase2側）のみでしょうか。
+→ Phase1の在庫表示・引当設計に店舗在庫を含めるかが決まる</a:t>
+            </a:r>
+          </a:p>
+        </p:txBody>
+      </p:sp>
+      <p:sp>
+        <p:nvSpPr>
+          <p:cNvPr id="17" name="Rounded Rectangle 16"/>
+          <p:cNvSpPr/>
+          <p:nvPr/>
+        </p:nvSpPr>
+        <p:spPr>
+          <a:xfrm>
+            <a:off x="4992624" y="3474720"/>
             <a:ext cx="530352" cy="310896"/>
           </a:xfrm>
           <a:prstGeom prst="roundRect">
@@ -11122,27 +11195,27 @@
           <a:p>
             <a:pPr algn="ctr"/>
             <a:r>
-              <a:rPr sz="750" b="1">
+              <a:rPr sz="800" b="1">
                 <a:solidFill>
                   <a:srgbClr val="FFFFFF"/>
                 </a:solidFill>
                 <a:latin typeface="Yu Gothic"/>
               </a:rPr>
-              <a:t>Q2</a:t>
-            </a:r>
-          </a:p>
-        </p:txBody>
-      </p:sp>
-      <p:sp>
-        <p:nvSpPr>
-          <p:cNvPr id="17" name="Rounded Rectangle 16"/>
-          <p:cNvSpPr/>
-          <p:nvPr/>
-        </p:nvSpPr>
-        <p:spPr>
-          <a:xfrm>
-            <a:off x="5577840" y="2898648"/>
-            <a:ext cx="3182112" cy="841248"/>
+              <a:t>補</a:t>
+            </a:r>
+          </a:p>
+        </p:txBody>
+      </p:sp>
+      <p:sp>
+        <p:nvSpPr>
+          <p:cNvPr id="18" name="Rounded Rectangle 17"/>
+          <p:cNvSpPr/>
+          <p:nvPr/>
+        </p:nvSpPr>
+        <p:spPr>
+          <a:xfrm>
+            <a:off x="5577840" y="3474720"/>
+            <a:ext cx="3182112" cy="1417320"/>
           </a:xfrm>
           <a:prstGeom prst="roundRect">
             <a:avLst/>
@@ -11182,81 +11255,84 @@
                 </a:solidFill>
                 <a:latin typeface="Yu Gothic"/>
               </a:rPr>
-              <a:t>仕入先からのオンライン伝票データは、最初にどのシステムへ到着し、入荷場所では何の画面で承認する？</a:t>
-            </a:r>
-          </a:p>
-        </p:txBody>
-      </p:sp>
-      <p:sp>
-        <p:nvSpPr>
-          <p:cNvPr id="18" name="Rounded Rectangle 17"/>
-          <p:cNvSpPr/>
-          <p:nvPr/>
-        </p:nvSpPr>
-        <p:spPr>
-          <a:xfrm>
-            <a:off x="4992624" y="3922776"/>
-            <a:ext cx="530352" cy="310896"/>
+              <a:t>適合システム・倉庫在庫システムへの商品マスタ反映は、CSV・参照・手動のどの方法でしょうか。
+→ EC連携設計時のインターフェース検討に使用</a:t>
+            </a:r>
+          </a:p>
+        </p:txBody>
+      </p:sp>
+      <p:sp>
+        <p:nvSpPr>
+          <p:cNvPr id="19" name="Rounded Rectangle 18"/>
+          <p:cNvSpPr/>
+          <p:nvPr/>
+        </p:nvSpPr>
+        <p:spPr>
+          <a:xfrm>
+            <a:off x="749808" y="8549640"/>
+            <a:ext cx="8010144" cy="914400"/>
           </a:xfrm>
           <a:prstGeom prst="roundRect">
             <a:avLst/>
           </a:prstGeom>
           <a:solidFill>
-            <a:srgbClr val="ED7D31"/>
-          </a:solidFill>
-          <a:ln w="10160">
-            <a:solidFill>
-              <a:srgbClr val="ED7D31"/>
-            </a:solidFill>
-          </a:ln>
-        </p:spPr>
-        <p:style>
-          <a:lnRef idx="1">
-            <a:schemeClr val="accent1"/>
-          </a:lnRef>
-          <a:fillRef idx="3">
-            <a:schemeClr val="accent1"/>
-          </a:fillRef>
-          <a:effectRef idx="2">
-            <a:schemeClr val="accent1"/>
-          </a:effectRef>
-          <a:fontRef idx="minor">
-            <a:schemeClr val="lt1"/>
-          </a:fontRef>
-        </p:style>
-        <p:txBody>
-          <a:bodyPr rtlCol="0" anchor="ctr" lIns="9144" rIns="9144" tIns="9144" bIns="9144"/>
+            <a:srgbClr val="D9EAF7"/>
+          </a:solidFill>
+          <a:ln w="10160">
+            <a:solidFill>
+              <a:srgbClr val="1F4E78"/>
+            </a:solidFill>
+          </a:ln>
+        </p:spPr>
+        <p:style>
+          <a:lnRef idx="1">
+            <a:schemeClr val="accent1"/>
+          </a:lnRef>
+          <a:fillRef idx="3">
+            <a:schemeClr val="accent1"/>
+          </a:fillRef>
+          <a:effectRef idx="2">
+            <a:schemeClr val="accent1"/>
+          </a:effectRef>
+          <a:fontRef idx="minor">
+            <a:schemeClr val="lt1"/>
+          </a:fontRef>
+        </p:style>
+        <p:txBody>
+          <a:bodyPr rtlCol="0" anchor="ctr" lIns="73152" rIns="73152" tIns="73152" bIns="73152"/>
           <a:lstStyle/>
           <a:p>
             <a:pPr algn="ctr"/>
             <a:r>
-              <a:rPr sz="750" b="1">
-                <a:solidFill>
-                  <a:srgbClr val="FFFFFF"/>
-                </a:solidFill>
-                <a:latin typeface="Yu Gothic"/>
-              </a:rPr>
-              <a:t>Q3</a:t>
-            </a:r>
-          </a:p>
-        </p:txBody>
-      </p:sp>
-      <p:sp>
-        <p:nvSpPr>
-          <p:cNvPr id="19" name="Rounded Rectangle 18"/>
-          <p:cNvSpPr/>
-          <p:nvPr/>
-        </p:nvSpPr>
-        <p:spPr>
-          <a:xfrm>
-            <a:off x="5577840" y="3922776"/>
-            <a:ext cx="3182112" cy="841248"/>
+              <a:rPr sz="1100" b="1">
+                <a:solidFill>
+                  <a:srgbClr val="1F4E78"/>
+                </a:solidFill>
+                <a:latin typeface="Yu Gothic"/>
+              </a:rPr>
+              <a:t>業務フローの骨格（確定）：
+入荷・在庫更新＝倉庫／店舗起点 → 基幹集約。BtoB配送出荷＝物流部 → 倉庫のみ。
+店舗在庫はタイヤ着脱作業で使用（Phase1に含むかが残る論点）。</a:t>
+            </a:r>
+          </a:p>
+        </p:txBody>
+      </p:sp>
+      <p:sp>
+        <p:nvSpPr>
+          <p:cNvPr id="20" name="Rounded Rectangle 19"/>
+          <p:cNvSpPr/>
+          <p:nvPr/>
+        </p:nvSpPr>
+        <p:spPr>
+          <a:xfrm>
+            <a:off x="749808" y="9784080"/>
+            <a:ext cx="8010144" cy="548640"/>
           </a:xfrm>
           <a:prstGeom prst="roundRect">
             <a:avLst/>
           </a:prstGeom>
           <a:solidFill>
-            <a:srgbClr val="FCE4D6"/>
+            <a:srgbClr val="FFFFFF"/>
           </a:solidFill>
           <a:ln w="10160">
             <a:solidFill>
@@ -11282,7 +11358,7 @@
           <a:bodyPr rtlCol="0" anchor="ctr" lIns="73152" rIns="73152" tIns="73152" bIns="73152"/>
           <a:lstStyle/>
           <a:p>
-            <a:pPr algn="l"/>
+            <a:pPr algn="ctr"/>
             <a:r>
               <a:rPr sz="800" b="0">
                 <a:solidFill>
@@ -11290,333 +11366,7 @@
                 </a:solidFill>
                 <a:latin typeface="Yu Gothic"/>
               </a:rPr>
-              <a:t>「倉庫在庫システムで数量管理のみ、卸先・店舗POSへ売上計上」の具体的な入力・連携順序は？</a:t>
-            </a:r>
-          </a:p>
-        </p:txBody>
-      </p:sp>
-      <p:sp>
-        <p:nvSpPr>
-          <p:cNvPr id="20" name="Rounded Rectangle 19"/>
-          <p:cNvSpPr/>
-          <p:nvPr/>
-        </p:nvSpPr>
-        <p:spPr>
-          <a:xfrm>
-            <a:off x="4992624" y="4946904"/>
-            <a:ext cx="530352" cy="310896"/>
-          </a:xfrm>
-          <a:prstGeom prst="roundRect">
-            <a:avLst/>
-          </a:prstGeom>
-          <a:solidFill>
-            <a:srgbClr val="ED7D31"/>
-          </a:solidFill>
-          <a:ln w="10160">
-            <a:solidFill>
-              <a:srgbClr val="ED7D31"/>
-            </a:solidFill>
-          </a:ln>
-        </p:spPr>
-        <p:style>
-          <a:lnRef idx="1">
-            <a:schemeClr val="accent1"/>
-          </a:lnRef>
-          <a:fillRef idx="3">
-            <a:schemeClr val="accent1"/>
-          </a:fillRef>
-          <a:effectRef idx="2">
-            <a:schemeClr val="accent1"/>
-          </a:effectRef>
-          <a:fontRef idx="minor">
-            <a:schemeClr val="lt1"/>
-          </a:fontRef>
-        </p:style>
-        <p:txBody>
-          <a:bodyPr rtlCol="0" anchor="ctr" lIns="9144" rIns="9144" tIns="9144" bIns="9144"/>
-          <a:lstStyle/>
-          <a:p>
-            <a:pPr algn="ctr"/>
-            <a:r>
-              <a:rPr sz="750" b="1">
-                <a:solidFill>
-                  <a:srgbClr val="FFFFFF"/>
-                </a:solidFill>
-                <a:latin typeface="Yu Gothic"/>
-              </a:rPr>
-              <a:t>Q4</a:t>
-            </a:r>
-          </a:p>
-        </p:txBody>
-      </p:sp>
-      <p:sp>
-        <p:nvSpPr>
-          <p:cNvPr id="21" name="Rounded Rectangle 20"/>
-          <p:cNvSpPr/>
-          <p:nvPr/>
-        </p:nvSpPr>
-        <p:spPr>
-          <a:xfrm>
-            <a:off x="5577840" y="4946904"/>
-            <a:ext cx="3182112" cy="841248"/>
-          </a:xfrm>
-          <a:prstGeom prst="roundRect">
-            <a:avLst/>
-          </a:prstGeom>
-          <a:solidFill>
-            <a:srgbClr val="FCE4D6"/>
-          </a:solidFill>
-          <a:ln w="10160">
-            <a:solidFill>
-              <a:srgbClr val="AAB7C4"/>
-            </a:solidFill>
-          </a:ln>
-        </p:spPr>
-        <p:style>
-          <a:lnRef idx="1">
-            <a:schemeClr val="accent1"/>
-          </a:lnRef>
-          <a:fillRef idx="3">
-            <a:schemeClr val="accent1"/>
-          </a:fillRef>
-          <a:effectRef idx="2">
-            <a:schemeClr val="accent1"/>
-          </a:effectRef>
-          <a:fontRef idx="minor">
-            <a:schemeClr val="lt1"/>
-          </a:fontRef>
-        </p:style>
-        <p:txBody>
-          <a:bodyPr rtlCol="0" anchor="ctr" lIns="73152" rIns="73152" tIns="73152" bIns="73152"/>
-          <a:lstStyle/>
-          <a:p>
-            <a:pPr algn="l"/>
-            <a:r>
-              <a:rPr sz="800" b="0">
-                <a:solidFill>
-                  <a:srgbClr val="333333"/>
-                </a:solidFill>
-                <a:latin typeface="Yu Gothic"/>
-              </a:rPr>
-              <a:t>交換作業時の店舗在庫利用は、Phase1の卸注文に含まれるのか、Phase2の作業依頼として別運用か？</a:t>
-            </a:r>
-          </a:p>
-        </p:txBody>
-      </p:sp>
-      <p:sp>
-        <p:nvSpPr>
-          <p:cNvPr id="22" name="Rounded Rectangle 21"/>
-          <p:cNvSpPr/>
-          <p:nvPr/>
-        </p:nvSpPr>
-        <p:spPr>
-          <a:xfrm>
-            <a:off x="4992624" y="5971032"/>
-            <a:ext cx="530352" cy="310896"/>
-          </a:xfrm>
-          <a:prstGeom prst="roundRect">
-            <a:avLst/>
-          </a:prstGeom>
-          <a:solidFill>
-            <a:srgbClr val="ED7D31"/>
-          </a:solidFill>
-          <a:ln w="10160">
-            <a:solidFill>
-              <a:srgbClr val="ED7D31"/>
-            </a:solidFill>
-          </a:ln>
-        </p:spPr>
-        <p:style>
-          <a:lnRef idx="1">
-            <a:schemeClr val="accent1"/>
-          </a:lnRef>
-          <a:fillRef idx="3">
-            <a:schemeClr val="accent1"/>
-          </a:fillRef>
-          <a:effectRef idx="2">
-            <a:schemeClr val="accent1"/>
-          </a:effectRef>
-          <a:fontRef idx="minor">
-            <a:schemeClr val="lt1"/>
-          </a:fontRef>
-        </p:style>
-        <p:txBody>
-          <a:bodyPr rtlCol="0" anchor="ctr" lIns="9144" rIns="9144" tIns="9144" bIns="9144"/>
-          <a:lstStyle/>
-          <a:p>
-            <a:pPr algn="ctr"/>
-            <a:r>
-              <a:rPr sz="750" b="1">
-                <a:solidFill>
-                  <a:srgbClr val="FFFFFF"/>
-                </a:solidFill>
-                <a:latin typeface="Yu Gothic"/>
-              </a:rPr>
-              <a:t>Q5</a:t>
-            </a:r>
-          </a:p>
-        </p:txBody>
-      </p:sp>
-      <p:sp>
-        <p:nvSpPr>
-          <p:cNvPr id="23" name="Rounded Rectangle 22"/>
-          <p:cNvSpPr/>
-          <p:nvPr/>
-        </p:nvSpPr>
-        <p:spPr>
-          <a:xfrm>
-            <a:off x="5577840" y="5971032"/>
-            <a:ext cx="3182112" cy="841248"/>
-          </a:xfrm>
-          <a:prstGeom prst="roundRect">
-            <a:avLst/>
-          </a:prstGeom>
-          <a:solidFill>
-            <a:srgbClr val="FCE4D6"/>
-          </a:solidFill>
-          <a:ln w="10160">
-            <a:solidFill>
-              <a:srgbClr val="AAB7C4"/>
-            </a:solidFill>
-          </a:ln>
-        </p:spPr>
-        <p:style>
-          <a:lnRef idx="1">
-            <a:schemeClr val="accent1"/>
-          </a:lnRef>
-          <a:fillRef idx="3">
-            <a:schemeClr val="accent1"/>
-          </a:fillRef>
-          <a:effectRef idx="2">
-            <a:schemeClr val="accent1"/>
-          </a:effectRef>
-          <a:fontRef idx="minor">
-            <a:schemeClr val="lt1"/>
-          </a:fontRef>
-        </p:style>
-        <p:txBody>
-          <a:bodyPr rtlCol="0" anchor="ctr" lIns="73152" rIns="73152" tIns="73152" bIns="73152"/>
-          <a:lstStyle/>
-          <a:p>
-            <a:pPr algn="l"/>
-            <a:r>
-              <a:rPr sz="800" b="0">
-                <a:solidFill>
-                  <a:srgbClr val="333333"/>
-                </a:solidFill>
-                <a:latin typeface="Yu Gothic"/>
-              </a:rPr>
-              <a:t>物流部のアナログ出荷指示は、電話・メール・FAX・Excel・紙のどれか？</a:t>
-            </a:r>
-          </a:p>
-        </p:txBody>
-      </p:sp>
-      <p:sp>
-        <p:nvSpPr>
-          <p:cNvPr id="24" name="Rounded Rectangle 23"/>
-          <p:cNvSpPr/>
-          <p:nvPr/>
-        </p:nvSpPr>
-        <p:spPr>
-          <a:xfrm>
-            <a:off x="749808" y="7845552"/>
-            <a:ext cx="8010144" cy="914400"/>
-          </a:xfrm>
-          <a:prstGeom prst="roundRect">
-            <a:avLst/>
-          </a:prstGeom>
-          <a:solidFill>
-            <a:srgbClr val="D9EAF7"/>
-          </a:solidFill>
-          <a:ln w="10160">
-            <a:solidFill>
-              <a:srgbClr val="1F4E78"/>
-            </a:solidFill>
-          </a:ln>
-        </p:spPr>
-        <p:style>
-          <a:lnRef idx="1">
-            <a:schemeClr val="accent1"/>
-          </a:lnRef>
-          <a:fillRef idx="3">
-            <a:schemeClr val="accent1"/>
-          </a:fillRef>
-          <a:effectRef idx="2">
-            <a:schemeClr val="accent1"/>
-          </a:effectRef>
-          <a:fontRef idx="minor">
-            <a:schemeClr val="lt1"/>
-          </a:fontRef>
-        </p:style>
-        <p:txBody>
-          <a:bodyPr rtlCol="0" anchor="ctr" lIns="73152" rIns="73152" tIns="73152" bIns="73152"/>
-          <a:lstStyle/>
-          <a:p>
-            <a:pPr algn="ctr"/>
-            <a:r>
-              <a:rPr sz="1100" b="1">
-                <a:solidFill>
-                  <a:srgbClr val="1F4E78"/>
-                </a:solidFill>
-                <a:latin typeface="Yu Gothic"/>
-              </a:rPr>
-              <a:t>現時点の業務フローの要点：
-「入荷・在庫更新」は倉庫／店舗の両方が起点 → 基幹集約。
-「BtoB配送出荷」は物流部 → 倉庫のみ。店舗在庫は交換作業時に使用。</a:t>
-            </a:r>
-          </a:p>
-        </p:txBody>
-      </p:sp>
-      <p:sp>
-        <p:nvSpPr>
-          <p:cNvPr id="25" name="Rounded Rectangle 24"/>
-          <p:cNvSpPr/>
-          <p:nvPr/>
-        </p:nvSpPr>
-        <p:spPr>
-          <a:xfrm>
-            <a:off x="749808" y="9144000"/>
-            <a:ext cx="8010144" cy="749808"/>
-          </a:xfrm>
-          <a:prstGeom prst="roundRect">
-            <a:avLst/>
-          </a:prstGeom>
-          <a:solidFill>
-            <a:srgbClr val="FFFFFF"/>
-          </a:solidFill>
-          <a:ln w="10160">
-            <a:solidFill>
-              <a:srgbClr val="AAB7C4"/>
-            </a:solidFill>
-          </a:ln>
-        </p:spPr>
-        <p:style>
-          <a:lnRef idx="1">
-            <a:schemeClr val="accent1"/>
-          </a:lnRef>
-          <a:fillRef idx="3">
-            <a:schemeClr val="accent1"/>
-          </a:fillRef>
-          <a:effectRef idx="2">
-            <a:schemeClr val="accent1"/>
-          </a:effectRef>
-          <a:fontRef idx="minor">
-            <a:schemeClr val="lt1"/>
-          </a:fontRef>
-        </p:style>
-        <p:txBody>
-          <a:bodyPr rtlCol="0" anchor="ctr" lIns="73152" rIns="73152" tIns="73152" bIns="73152"/>
-          <a:lstStyle/>
-          <a:p>
-            <a:pPr algn="ctr"/>
-            <a:r>
-              <a:rPr sz="800" b="0">
-                <a:solidFill>
-                  <a:srgbClr val="333333"/>
-                </a:solidFill>
-                <a:latin typeface="Yu Gothic"/>
-              </a:rPr>
-              <a:t>凡例：緑＝YH回答で確定　／　オレンジ＝追加確認が必要　／　赤＝店舗配送出荷なし・POSステータスなし</a:t>
+              <a:t>凡例：緑＝確定　／　青＝仮置き（メール・電話）　／　オレンジ＝要確認　／　赤＝店舗配送出荷なし・POSステータスなし</a:t>
             </a:r>
           </a:p>
         </p:txBody>

--- a/knowledge/自動車アフターマーケット・部品卸/イエローハット_資料/ASIS_Phase1_業務フロー_YH回答反映.pptx
+++ b/knowledge/自動車アフターマーケット・部品卸/イエローハット_資料/ASIS_Phase1_業務フロー_YH回答反映.pptx
@@ -4962,11 +4962,11 @@
             <a:avLst/>
           </a:prstGeom>
           <a:solidFill>
-            <a:srgbClr val="FCE4D6"/>
-          </a:solidFill>
-          <a:ln w="10160">
-            <a:solidFill>
-              <a:srgbClr val="ED7D31"/>
+            <a:srgbClr val="E2F0D9"/>
+          </a:solidFill>
+          <a:ln w="10160">
+            <a:solidFill>
+              <a:srgbClr val="70AD47"/>
             </a:solidFill>
           </a:ln>
         </p:spPr>
@@ -4992,12 +4992,12 @@
             <a:r>
               <a:rPr sz="700" b="0">
                 <a:solidFill>
-                  <a:srgbClr val="ED7D31"/>
+                  <a:srgbClr val="70AD47"/>
                 </a:solidFill>
                 <a:latin typeface="Yu Gothic"/>
               </a:rPr>
               <a:t>基幹商品マスタを使用
-反映方法は要確認</a:t>
+CSVまたは画面入力</a:t>
             </a:r>
           </a:p>
         </p:txBody>
@@ -5017,11 +5017,11 @@
             <a:avLst/>
           </a:prstGeom>
           <a:solidFill>
-            <a:srgbClr val="ED7D31"/>
-          </a:solidFill>
-          <a:ln w="10160">
-            <a:solidFill>
-              <a:srgbClr val="ED7D31"/>
+            <a:srgbClr val="70AD47"/>
+          </a:solidFill>
+          <a:ln w="10160">
+            <a:solidFill>
+              <a:srgbClr val="70AD47"/>
             </a:solidFill>
           </a:ln>
         </p:spPr>
@@ -5051,7 +5051,7 @@
                 </a:solidFill>
                 <a:latin typeface="Yu Gothic"/>
               </a:rPr>
-              <a:t>要確認</a:t>
+              <a:t>確定</a:t>
             </a:r>
           </a:p>
         </p:txBody>
@@ -5107,11 +5107,11 @@
             <a:avLst/>
           </a:prstGeom>
           <a:solidFill>
-            <a:srgbClr val="FCE4D6"/>
-          </a:solidFill>
-          <a:ln w="10160">
-            <a:solidFill>
-              <a:srgbClr val="ED7D31"/>
+            <a:srgbClr val="E2F0D9"/>
+          </a:solidFill>
+          <a:ln w="10160">
+            <a:solidFill>
+              <a:srgbClr val="70AD47"/>
             </a:solidFill>
           </a:ln>
         </p:spPr>
@@ -5137,12 +5137,12 @@
             <a:r>
               <a:rPr sz="700" b="0">
                 <a:solidFill>
-                  <a:srgbClr val="ED7D31"/>
+                  <a:srgbClr val="70AD47"/>
                 </a:solidFill>
                 <a:latin typeface="Yu Gothic"/>
               </a:rPr>
               <a:t>基幹商品マスタを使用
-自動連携ではない</a:t>
+CSVまたは画面入力</a:t>
             </a:r>
           </a:p>
         </p:txBody>
@@ -6909,8 +6909,8 @@
                 <a:latin typeface="Yu Gothic"/>
               </a:rPr>
               <a:t>YH回答＋8/7整理で確定：
-・仕入データ／商品の到着先は各店舗・倉庫。POS／倉庫システムで入荷入力し、入庫都度基幹へ反映（基本手入力なし＝受注側の話）
-・商品マスタの自動連携はPOSのみ
+・商品マスタの自動連携はPOSのみ。適合・倉庫へはCSVまたは画面入力で反映
+・仕入データ／商品の到着先は各店舗・倉庫。POS／倉庫システムで入荷入力し、入庫都度基幹へ反映
 ・倉庫＝倉庫在庫システム、店舗＝POSが実在庫の正で、基幹が集約</a:t>
             </a:r>
           </a:p>
@@ -10605,7 +10605,7 @@
                 </a:solidFill>
                 <a:latin typeface="Yu Gothic"/>
               </a:rPr>
-              <a:t>2. 商品マスタ自動連携：POSのみ／予約に顧客情報なし</a:t>
+              <a:t>2. 商品マスタ自動連携はPOSのみ。適合・倉庫へはCSVまたは画面入力／予約に顧客情報なし</a:t>
             </a:r>
           </a:p>
         </p:txBody>
@@ -11037,7 +11037,7 @@
                 </a:solidFill>
                 <a:latin typeface="Yu Gothic"/>
               </a:rPr>
-              <a:t>残る確認（本丸1点＋補足1点）</a:t>
+              <a:t>残る確認（本丸1点）</a:t>
             </a:r>
           </a:p>
         </p:txBody>
@@ -11148,115 +11148,6 @@
               <a:t>タイヤ着脱での店舗在庫利用は、Phase1の卸販売（BtoB注文）でも発生しますか？
 それとも作業依頼（Phase2側）のみでしょうか。
 → Phase1の在庫表示・引当設計に店舗在庫を含めるかが決まる</a:t>
-            </a:r>
-          </a:p>
-        </p:txBody>
-      </p:sp>
-      <p:sp>
-        <p:nvSpPr>
-          <p:cNvPr id="17" name="Rounded Rectangle 16"/>
-          <p:cNvSpPr/>
-          <p:nvPr/>
-        </p:nvSpPr>
-        <p:spPr>
-          <a:xfrm>
-            <a:off x="4992624" y="3474720"/>
-            <a:ext cx="530352" cy="310896"/>
-          </a:xfrm>
-          <a:prstGeom prst="roundRect">
-            <a:avLst/>
-          </a:prstGeom>
-          <a:solidFill>
-            <a:srgbClr val="ED7D31"/>
-          </a:solidFill>
-          <a:ln w="10160">
-            <a:solidFill>
-              <a:srgbClr val="ED7D31"/>
-            </a:solidFill>
-          </a:ln>
-        </p:spPr>
-        <p:style>
-          <a:lnRef idx="1">
-            <a:schemeClr val="accent1"/>
-          </a:lnRef>
-          <a:fillRef idx="3">
-            <a:schemeClr val="accent1"/>
-          </a:fillRef>
-          <a:effectRef idx="2">
-            <a:schemeClr val="accent1"/>
-          </a:effectRef>
-          <a:fontRef idx="minor">
-            <a:schemeClr val="lt1"/>
-          </a:fontRef>
-        </p:style>
-        <p:txBody>
-          <a:bodyPr rtlCol="0" anchor="ctr" lIns="9144" rIns="9144" tIns="9144" bIns="9144"/>
-          <a:lstStyle/>
-          <a:p>
-            <a:pPr algn="ctr"/>
-            <a:r>
-              <a:rPr sz="800" b="1">
-                <a:solidFill>
-                  <a:srgbClr val="FFFFFF"/>
-                </a:solidFill>
-                <a:latin typeface="Yu Gothic"/>
-              </a:rPr>
-              <a:t>補</a:t>
-            </a:r>
-          </a:p>
-        </p:txBody>
-      </p:sp>
-      <p:sp>
-        <p:nvSpPr>
-          <p:cNvPr id="18" name="Rounded Rectangle 17"/>
-          <p:cNvSpPr/>
-          <p:nvPr/>
-        </p:nvSpPr>
-        <p:spPr>
-          <a:xfrm>
-            <a:off x="5577840" y="3474720"/>
-            <a:ext cx="3182112" cy="1417320"/>
-          </a:xfrm>
-          <a:prstGeom prst="roundRect">
-            <a:avLst/>
-          </a:prstGeom>
-          <a:solidFill>
-            <a:srgbClr val="FCE4D6"/>
-          </a:solidFill>
-          <a:ln w="10160">
-            <a:solidFill>
-              <a:srgbClr val="AAB7C4"/>
-            </a:solidFill>
-          </a:ln>
-        </p:spPr>
-        <p:style>
-          <a:lnRef idx="1">
-            <a:schemeClr val="accent1"/>
-          </a:lnRef>
-          <a:fillRef idx="3">
-            <a:schemeClr val="accent1"/>
-          </a:fillRef>
-          <a:effectRef idx="2">
-            <a:schemeClr val="accent1"/>
-          </a:effectRef>
-          <a:fontRef idx="minor">
-            <a:schemeClr val="lt1"/>
-          </a:fontRef>
-        </p:style>
-        <p:txBody>
-          <a:bodyPr rtlCol="0" anchor="ctr" lIns="73152" rIns="73152" tIns="73152" bIns="73152"/>
-          <a:lstStyle/>
-          <a:p>
-            <a:pPr algn="l"/>
-            <a:r>
-              <a:rPr sz="800" b="0">
-                <a:solidFill>
-                  <a:srgbClr val="333333"/>
-                </a:solidFill>
-                <a:latin typeface="Yu Gothic"/>
-              </a:rPr>
-              <a:t>適合システム・倉庫在庫システムへの商品マスタ反映は、CSV・参照・手動のどの方法でしょうか。
-→ EC連携設計時のインターフェース検討に使用</a:t>
             </a:r>
           </a:p>
         </p:txBody>
